--- a/m5/diapositivos/sessao-05-m5-f08.pptx
+++ b/m5/diapositivos/sessao-05-m5-f08.pptx
@@ -2587,13 +2587,10 @@
               <a:lnSpc>
                 <a:spcPct val="120000"/>
               </a:lnSpc>
-              <a:spcAft>
-                <a:spcPts val="1000"/>
-              </a:spcAft>
-              <a:buNone/>
-            </a:pPr>
-            <a:r>
-              <a:rPr lang="en-US" sz="2300" dirty="0">
+              <a:buNone/>
+            </a:pPr>
+            <a:r>
+              <a:rPr lang="en-US" sz="2300" b="1" dirty="0">
                 <a:solidFill>
                   <a:srgbClr val="F2F0EA"/>
                 </a:solidFill>
@@ -2601,18 +2598,12 @@
                 <a:ea typeface="Georgia" pitchFamily="34" charset="-122"/>
                 <a:cs typeface="Georgia" pitchFamily="34" charset="-120"/>
               </a:rPr>
-              <a:t>As perguntas de Teresa: podias tu com a desesperança e com a vida? Que farias da vida sem a tua companheira? Nunca hás de amar outra vez? Os factos: Simão matou Baltasar e vai degredado para a Índia; a nau saiu do Porto a 17 de março de 1807; Teresa morreu no convento de Monchique; Mariana, a filha do ferrador, vai a bordo com ele.</a:t>
-            </a:r>
-            <a:endParaRPr lang="en-US" sz="2300" dirty="0"/>
-          </a:p>
-          <a:p>
+              <a:t>As perguntas de Teresa:</a:t>
+            </a:r>
             <a:pPr indent="0" marL="0">
               <a:lnSpc>
                 <a:spcPct val="120000"/>
               </a:lnSpc>
-              <a:spcAft>
-                <a:spcPts val="1000"/>
-              </a:spcAft>
               <a:buNone/>
             </a:pPr>
             <a:r>
@@ -2624,7 +2615,75 @@
                 <a:ea typeface="Georgia" pitchFamily="34" charset="-122"/>
                 <a:cs typeface="Georgia" pitchFamily="34" charset="-120"/>
               </a:rPr>
-              <a:t>As marcas de uma carta: local e data, vocativo, despedida, assinatura.</a:t>
+              <a:t> podias tu com a desesperança e com a vida? Que farias da vida sem a tua companheira? Nunca hás de amar outra vez? </a:t>
+            </a:r>
+            <a:pPr indent="0" marL="0">
+              <a:lnSpc>
+                <a:spcPct val="120000"/>
+              </a:lnSpc>
+              <a:buNone/>
+            </a:pPr>
+            <a:r>
+              <a:rPr lang="en-US" sz="2300" b="1" dirty="0">
+                <a:solidFill>
+                  <a:srgbClr val="F2F0EA"/>
+                </a:solidFill>
+                <a:latin typeface="Georgia" pitchFamily="34" charset="0"/>
+                <a:ea typeface="Georgia" pitchFamily="34" charset="-122"/>
+                <a:cs typeface="Georgia" pitchFamily="34" charset="-120"/>
+              </a:rPr>
+              <a:t>Os factos:</a:t>
+            </a:r>
+            <a:pPr indent="0" marL="0">
+              <a:lnSpc>
+                <a:spcPct val="120000"/>
+              </a:lnSpc>
+              <a:buNone/>
+            </a:pPr>
+            <a:r>
+              <a:rPr lang="en-US" sz="2300" dirty="0">
+                <a:solidFill>
+                  <a:srgbClr val="F2F0EA"/>
+                </a:solidFill>
+                <a:latin typeface="Georgia" pitchFamily="34" charset="0"/>
+                <a:ea typeface="Georgia" pitchFamily="34" charset="-122"/>
+                <a:cs typeface="Georgia" pitchFamily="34" charset="-120"/>
+              </a:rPr>
+              <a:t> Simão matou Baltasar e vai degredado para a Índia; a nau saiu do Porto a 17 de março de 1807; Teresa morreu no convento de Monchique; Mariana, a filha do ferrador, vai a bordo com ele. </a:t>
+            </a:r>
+            <a:pPr indent="0" marL="0">
+              <a:lnSpc>
+                <a:spcPct val="120000"/>
+              </a:lnSpc>
+              <a:buNone/>
+            </a:pPr>
+            <a:r>
+              <a:rPr lang="en-US" sz="2300" b="1" dirty="0">
+                <a:solidFill>
+                  <a:srgbClr val="F2F0EA"/>
+                </a:solidFill>
+                <a:latin typeface="Georgia" pitchFamily="34" charset="0"/>
+                <a:ea typeface="Georgia" pitchFamily="34" charset="-122"/>
+                <a:cs typeface="Georgia" pitchFamily="34" charset="-120"/>
+              </a:rPr>
+              <a:t>As marcas de uma carta:</a:t>
+            </a:r>
+            <a:pPr indent="0" marL="0">
+              <a:lnSpc>
+                <a:spcPct val="120000"/>
+              </a:lnSpc>
+              <a:buNone/>
+            </a:pPr>
+            <a:r>
+              <a:rPr lang="en-US" sz="2300" dirty="0">
+                <a:solidFill>
+                  <a:srgbClr val="F2F0EA"/>
+                </a:solidFill>
+                <a:latin typeface="Georgia" pitchFamily="34" charset="0"/>
+                <a:ea typeface="Georgia" pitchFamily="34" charset="-122"/>
+                <a:cs typeface="Georgia" pitchFamily="34" charset="-120"/>
+              </a:rPr>
+              <a:t> local e data, vocativo, despedida, assinatura.</a:t>
             </a:r>
             <a:endParaRPr lang="en-US" sz="2300" dirty="0"/>
           </a:p>
@@ -4786,7 +4845,41 @@
                 <a:ea typeface="Georgia" pitchFamily="34" charset="-122"/>
                 <a:cs typeface="Georgia" pitchFamily="34" charset="-120"/>
               </a:rPr>
-              <a:t>Teresa termina a carta a pedir: «Soffre […] estas derradeiras perguntas, a que tu responderás, no alto mar». Escreve a resposta de Simão (220–300 palavras), na nau, na noite a seguir à morte de Teresa. Mantém a coerência com a personagem e com o Romantismo; usa português atual, com um ou dois ecos do texto.</a:t>
+              <a:t>Teresa termina a carta a pedir: «Soffre […] estas derradeiras perguntas, a que tu responderás, no alto mar». Escreve a </a:t>
+            </a:r>
+            <a:pPr indent="0" marL="0">
+              <a:lnSpc>
+                <a:spcPct val="120000"/>
+              </a:lnSpc>
+              <a:buNone/>
+            </a:pPr>
+            <a:r>
+              <a:rPr lang="en-US" sz="2300" b="1" dirty="0">
+                <a:solidFill>
+                  <a:srgbClr val="F2F0EA"/>
+                </a:solidFill>
+                <a:latin typeface="Georgia" pitchFamily="34" charset="0"/>
+                <a:ea typeface="Georgia" pitchFamily="34" charset="-122"/>
+                <a:cs typeface="Georgia" pitchFamily="34" charset="-120"/>
+              </a:rPr>
+              <a:t>resposta de Simão</a:t>
+            </a:r>
+            <a:pPr indent="0" marL="0">
+              <a:lnSpc>
+                <a:spcPct val="120000"/>
+              </a:lnSpc>
+              <a:buNone/>
+            </a:pPr>
+            <a:r>
+              <a:rPr lang="en-US" sz="2300" dirty="0">
+                <a:solidFill>
+                  <a:srgbClr val="F2F0EA"/>
+                </a:solidFill>
+                <a:latin typeface="Georgia" pitchFamily="34" charset="0"/>
+                <a:ea typeface="Georgia" pitchFamily="34" charset="-122"/>
+                <a:cs typeface="Georgia" pitchFamily="34" charset="-120"/>
+              </a:rPr>
+              <a:t> (220–300 palavras), na nau, na noite a seguir à morte de Teresa. Mantém a coerência com a personagem e com o Romantismo; usa português atual, com um ou dois ecos do texto.</a:t>
             </a:r>
             <a:endParaRPr lang="en-US" sz="2300" dirty="0"/>
           </a:p>
